--- a/PRESENTATION.pptx
+++ b/PRESENTATION.pptx
@@ -3535,6 +3535,58 @@
               <a:t>‹Nr.›</a:t>
             </a:fld>
             <a:endParaRPr lang="de-DE"/>
+          </a:p>
+        </p:txBody>
+      </p:sp>
+      <p:sp>
+        <p:nvSpPr>
+          <p:cNvPr id="8" name="Rechteck 7">
+            <a:extLst>
+              <a:ext uri="{FF2B5EF4-FFF2-40B4-BE49-F238E27FC236}">
+                <a16:creationId xmlns:a16="http://schemas.microsoft.com/office/drawing/2014/main" id="{7586FFAE-4898-1A5B-ECD6-D2649E1F9444}"/>
+              </a:ext>
+            </a:extLst>
+          </p:cNvPr>
+          <p:cNvSpPr/>
+          <p:nvPr userDrawn="1"/>
+        </p:nvSpPr>
+        <p:spPr>
+          <a:xfrm>
+            <a:off x="0" y="6508955"/>
+            <a:ext cx="12192000" cy="349045"/>
+          </a:xfrm>
+          <a:prstGeom prst="rect">
+            <a:avLst/>
+          </a:prstGeom>
+          <a:solidFill>
+            <a:srgbClr val="4F46E5"/>
+          </a:solidFill>
+          <a:ln>
+            <a:noFill/>
+          </a:ln>
+        </p:spPr>
+        <p:style>
+          <a:lnRef idx="2">
+            <a:schemeClr val="accent1">
+              <a:shade val="15000"/>
+            </a:schemeClr>
+          </a:lnRef>
+          <a:fillRef idx="1">
+            <a:schemeClr val="accent1"/>
+          </a:fillRef>
+          <a:effectRef idx="0">
+            <a:schemeClr val="accent1"/>
+          </a:effectRef>
+          <a:fontRef idx="minor">
+            <a:schemeClr val="lt1"/>
+          </a:fontRef>
+        </p:style>
+        <p:txBody>
+          <a:bodyPr rtlCol="0" anchor="ctr"/>
+          <a:lstStyle/>
+          <a:p>
+            <a:pPr algn="ctr"/>
+            <a:endParaRPr lang="de-AT" noProof="0"/>
           </a:p>
         </p:txBody>
       </p:sp>
@@ -6503,6 +6555,23 @@
 </file>
 
 <file path=customXml/item1.xml><?xml version="1.0" encoding="utf-8"?>
+<?mso-contentType ?>
+<FormTemplates xmlns="http://schemas.microsoft.com/sharepoint/v3/contenttype/forms">
+  <Display>DocumentLibraryForm</Display>
+  <Edit>DocumentLibraryForm</Edit>
+  <New>DocumentLibraryForm</New>
+</FormTemplates>
+</file>
+
+<file path=customXml/item2.xml><?xml version="1.0" encoding="utf-8"?>
+<p:properties xmlns:p="http://schemas.microsoft.com/office/2006/metadata/properties" xmlns:xsi="http://www.w3.org/2001/XMLSchema-instance" xmlns:pc="http://schemas.microsoft.com/office/infopath/2007/PartnerControls">
+  <documentManagement>
+    <_activity xmlns="12c9e71c-1a25-473c-9bae-02ec0a5e4ef8" xsi:nil="true"/>
+  </documentManagement>
+</p:properties>
+</file>
+
+<file path=customXml/item3.xml><?xml version="1.0" encoding="utf-8"?>
 <ct:contentTypeSchema xmlns:ct="http://schemas.microsoft.com/office/2006/metadata/contentType" xmlns:ma="http://schemas.microsoft.com/office/2006/metadata/properties/metaAttributes" ct:_="" ma:_="" ma:contentTypeName="Dokument" ma:contentTypeID="0x0101009214458EF7BD3048BEB71791FF1FFB03" ma:contentTypeVersion="10" ma:contentTypeDescription="Ein neues Dokument erstellen." ma:contentTypeScope="" ma:versionID="3e5f80840bb1ae43b616eb6612400c7a">
   <xsd:schema xmlns:xsd="http://www.w3.org/2001/XMLSchema" xmlns:xs="http://www.w3.org/2001/XMLSchema" xmlns:p="http://schemas.microsoft.com/office/2006/metadata/properties" xmlns:ns3="12c9e71c-1a25-473c-9bae-02ec0a5e4ef8" targetNamespace="http://schemas.microsoft.com/office/2006/metadata/properties" ma:root="true" ma:fieldsID="a0480af5330bd4fbdc0cfcc756dc45d0" ns3:_="">
     <xsd:import namespace="12c9e71c-1a25-473c-9bae-02ec0a5e4ef8"/>
@@ -6684,37 +6753,10 @@
 </ct:contentTypeSchema>
 </file>
 
-<file path=customXml/item2.xml><?xml version="1.0" encoding="utf-8"?>
-<p:properties xmlns:p="http://schemas.microsoft.com/office/2006/metadata/properties" xmlns:xsi="http://www.w3.org/2001/XMLSchema-instance" xmlns:pc="http://schemas.microsoft.com/office/infopath/2007/PartnerControls">
-  <documentManagement>
-    <_activity xmlns="12c9e71c-1a25-473c-9bae-02ec0a5e4ef8" xsi:nil="true"/>
-  </documentManagement>
-</p:properties>
-</file>
-
-<file path=customXml/item3.xml><?xml version="1.0" encoding="utf-8"?>
-<?mso-contentType ?>
-<FormTemplates xmlns="http://schemas.microsoft.com/sharepoint/v3/contenttype/forms">
-  <Display>DocumentLibraryForm</Display>
-  <Edit>DocumentLibraryForm</Edit>
-  <New>DocumentLibraryForm</New>
-</FormTemplates>
-</file>
-
 <file path=customXml/itemProps1.xml><?xml version="1.0" encoding="utf-8"?>
-<ds:datastoreItem xmlns:ds="http://schemas.openxmlformats.org/officeDocument/2006/customXml" ds:itemID="{FE7C8651-16B0-47C7-966D-3F9D7D0F2471}">
+<ds:datastoreItem xmlns:ds="http://schemas.openxmlformats.org/officeDocument/2006/customXml" ds:itemID="{440DEAA1-9ECC-46EC-B80F-899033296D36}">
   <ds:schemaRefs>
-    <ds:schemaRef ds:uri="12c9e71c-1a25-473c-9bae-02ec0a5e4ef8"/>
-    <ds:schemaRef ds:uri="http://purl.org/dc/elements/1.1/"/>
-    <ds:schemaRef ds:uri="http://purl.org/dc/terms/"/>
-    <ds:schemaRef ds:uri="http://schemas.microsoft.com/internal/obd"/>
-    <ds:schemaRef ds:uri="http://schemas.microsoft.com/office/2006/documentManagement/types"/>
-    <ds:schemaRef ds:uri="http://schemas.microsoft.com/office/2006/metadata/contentType"/>
-    <ds:schemaRef ds:uri="http://schemas.microsoft.com/office/2006/metadata/properties"/>
-    <ds:schemaRef ds:uri="http://schemas.microsoft.com/office/2006/metadata/properties/metaAttributes"/>
-    <ds:schemaRef ds:uri="http://schemas.microsoft.com/office/infopath/2007/PartnerControls"/>
-    <ds:schemaRef ds:uri="http://schemas.openxmlformats.org/package/2006/metadata/core-properties"/>
-    <ds:schemaRef ds:uri="http://www.w3.org/2001/XMLSchema"/>
+    <ds:schemaRef ds:uri="http://schemas.microsoft.com/sharepoint/v3/contenttype/forms"/>
   </ds:schemaRefs>
 </ds:datastoreItem>
 </file>
@@ -6736,9 +6778,19 @@
 </file>
 
 <file path=customXml/itemProps3.xml><?xml version="1.0" encoding="utf-8"?>
-<ds:datastoreItem xmlns:ds="http://schemas.openxmlformats.org/officeDocument/2006/customXml" ds:itemID="{440DEAA1-9ECC-46EC-B80F-899033296D36}">
+<ds:datastoreItem xmlns:ds="http://schemas.openxmlformats.org/officeDocument/2006/customXml" ds:itemID="{FE7C8651-16B0-47C7-966D-3F9D7D0F2471}">
   <ds:schemaRefs>
-    <ds:schemaRef ds:uri="http://schemas.microsoft.com/sharepoint/v3/contenttype/forms"/>
+    <ds:schemaRef ds:uri="12c9e71c-1a25-473c-9bae-02ec0a5e4ef8"/>
+    <ds:schemaRef ds:uri="http://purl.org/dc/elements/1.1/"/>
+    <ds:schemaRef ds:uri="http://purl.org/dc/terms/"/>
+    <ds:schemaRef ds:uri="http://schemas.microsoft.com/internal/obd"/>
+    <ds:schemaRef ds:uri="http://schemas.microsoft.com/office/2006/documentManagement/types"/>
+    <ds:schemaRef ds:uri="http://schemas.microsoft.com/office/2006/metadata/contentType"/>
+    <ds:schemaRef ds:uri="http://schemas.microsoft.com/office/2006/metadata/properties"/>
+    <ds:schemaRef ds:uri="http://schemas.microsoft.com/office/2006/metadata/properties/metaAttributes"/>
+    <ds:schemaRef ds:uri="http://schemas.microsoft.com/office/infopath/2007/PartnerControls"/>
+    <ds:schemaRef ds:uri="http://schemas.openxmlformats.org/package/2006/metadata/core-properties"/>
+    <ds:schemaRef ds:uri="http://www.w3.org/2001/XMLSchema"/>
   </ds:schemaRefs>
 </ds:datastoreItem>
 </file>